--- a/Day11-React-UI-Logic-and-Full-Stack/Day11_Deck_React_UI_Logic_and_Full_Stack.pptx
+++ b/Day11-React-UI-Logic-and-Full-Stack/Day11_Deck_React_UI_Logic_and_Full_Stack.pptx
@@ -3738,13 +3738,13 @@
           <a:noFill/>
         </p:spPr>
         <p:txBody>
-          <a:bodyPr wrap="square" lIns="0" rIns="0" tIns="0" bIns="0" anchor="t">
-            <a:spAutoFit/>
-          </a:bodyPr>
-          <a:lstStyle/>
-          <a:p>
-            <a:r>
-              <a:rPr sz="980" b="0" i="0">
+          <a:bodyPr wrap="none" lIns="0" rIns="0" tIns="0" bIns="0" anchor="t">
+            <a:spAutoFit/>
+          </a:bodyPr>
+          <a:lstStyle/>
+          <a:p>
+            <a:r>
+              <a:rPr sz="863" b="0" i="0">
                 <a:solidFill>
                   <a:srgbClr val="EAF7F5"/>
                 </a:solidFill>
@@ -3755,7 +3755,7 @@
           </a:p>
           <a:p>
             <a:r>
-              <a:rPr sz="980" b="0" i="0">
+              <a:rPr sz="863" b="0" i="0">
                 <a:solidFill>
                   <a:srgbClr val="EAF7F5"/>
                 </a:solidFill>
@@ -3766,7 +3766,7 @@
           </a:p>
           <a:p>
             <a:r>
-              <a:rPr sz="980" b="0" i="0">
+              <a:rPr sz="863" b="0" i="0">
                 <a:solidFill>
                   <a:srgbClr val="EAF7F5"/>
                 </a:solidFill>
@@ -3777,7 +3777,7 @@
           </a:p>
           <a:p>
             <a:r>
-              <a:rPr sz="980" b="0" i="0">
+              <a:rPr sz="863" b="0" i="0">
                 <a:solidFill>
                   <a:srgbClr val="EAF7F5"/>
                 </a:solidFill>
@@ -3788,7 +3788,7 @@
           </a:p>
           <a:p>
             <a:r>
-              <a:rPr sz="980" b="0" i="0">
+              <a:rPr sz="863" b="0" i="0">
                 <a:solidFill>
                   <a:srgbClr val="EAF7F5"/>
                 </a:solidFill>
@@ -3799,7 +3799,7 @@
           </a:p>
           <a:p>
             <a:r>
-              <a:rPr sz="980" b="0" i="0">
+              <a:rPr sz="863" b="0" i="0">
                 <a:solidFill>
                   <a:srgbClr val="EAF7F5"/>
                 </a:solidFill>
@@ -3810,7 +3810,7 @@
           </a:p>
           <a:p>
             <a:r>
-              <a:rPr sz="980" b="0" i="0">
+              <a:rPr sz="863" b="0" i="0">
                 <a:solidFill>
                   <a:srgbClr val="EAF7F5"/>
                 </a:solidFill>
@@ -3821,7 +3821,7 @@
           </a:p>
           <a:p>
             <a:r>
-              <a:rPr sz="980" b="0" i="0">
+              <a:rPr sz="863" b="0" i="0">
                 <a:solidFill>
                   <a:srgbClr val="EAF7F5"/>
                 </a:solidFill>
@@ -3832,7 +3832,7 @@
           </a:p>
           <a:p>
             <a:r>
-              <a:rPr sz="980" b="0" i="0">
+              <a:rPr sz="863" b="0" i="0">
                 <a:solidFill>
                   <a:srgbClr val="EAF7F5"/>
                 </a:solidFill>
@@ -5281,13 +5281,13 @@
           <a:noFill/>
         </p:spPr>
         <p:txBody>
-          <a:bodyPr wrap="square" lIns="0" rIns="0" tIns="0" bIns="0" anchor="t">
-            <a:spAutoFit/>
-          </a:bodyPr>
-          <a:lstStyle/>
-          <a:p>
-            <a:r>
-              <a:rPr sz="1085" b="0" i="0">
+          <a:bodyPr wrap="none" lIns="0" rIns="0" tIns="0" bIns="0" anchor="t">
+            <a:spAutoFit/>
+          </a:bodyPr>
+          <a:lstStyle/>
+          <a:p>
+            <a:r>
+              <a:rPr sz="954" b="0" i="0">
                 <a:solidFill>
                   <a:srgbClr val="EAF7F5"/>
                 </a:solidFill>
@@ -5298,7 +5298,7 @@
           </a:p>
           <a:p>
             <a:r>
-              <a:rPr sz="1085" b="0" i="0">
+              <a:rPr sz="954" b="0" i="0">
                 <a:solidFill>
                   <a:srgbClr val="EAF7F5"/>
                 </a:solidFill>
@@ -5309,7 +5309,7 @@
           </a:p>
           <a:p>
             <a:r>
-              <a:rPr sz="1085" b="0" i="0">
+              <a:rPr sz="954" b="0" i="0">
                 <a:solidFill>
                   <a:srgbClr val="EAF7F5"/>
                 </a:solidFill>
@@ -5320,7 +5320,7 @@
           </a:p>
           <a:p>
             <a:r>
-              <a:rPr sz="1085" b="0" i="0">
+              <a:rPr sz="954" b="0" i="0">
                 <a:solidFill>
                   <a:srgbClr val="EAF7F5"/>
                 </a:solidFill>
@@ -5331,7 +5331,7 @@
           </a:p>
           <a:p>
             <a:r>
-              <a:rPr sz="1085" b="0" i="0">
+              <a:rPr sz="954" b="0" i="0">
                 <a:solidFill>
                   <a:srgbClr val="EAF7F5"/>
                 </a:solidFill>
@@ -5342,7 +5342,7 @@
           </a:p>
           <a:p>
             <a:r>
-              <a:rPr sz="1085" b="0" i="0">
+              <a:rPr sz="954" b="0" i="0">
                 <a:solidFill>
                   <a:srgbClr val="EAF7F5"/>
                 </a:solidFill>
@@ -5353,7 +5353,7 @@
           </a:p>
           <a:p>
             <a:r>
-              <a:rPr sz="1085" b="0" i="0">
+              <a:rPr sz="954" b="0" i="0">
                 <a:solidFill>
                   <a:srgbClr val="EAF7F5"/>
                 </a:solidFill>
@@ -5364,7 +5364,7 @@
           </a:p>
           <a:p>
             <a:r>
-              <a:rPr sz="1085" b="0" i="0">
+              <a:rPr sz="954" b="0" i="0">
                 <a:solidFill>
                   <a:srgbClr val="EAF7F5"/>
                 </a:solidFill>
@@ -5375,7 +5375,7 @@
           </a:p>
           <a:p>
             <a:r>
-              <a:rPr sz="1085" b="0" i="0">
+              <a:rPr sz="954" b="0" i="0">
                 <a:solidFill>
                   <a:srgbClr val="EAF7F5"/>
                 </a:solidFill>
@@ -5386,7 +5386,7 @@
           </a:p>
           <a:p>
             <a:r>
-              <a:rPr sz="1085" b="0" i="0">
+              <a:rPr sz="954" b="0" i="0">
                 <a:solidFill>
                   <a:srgbClr val="EAF7F5"/>
                 </a:solidFill>
@@ -5397,7 +5397,7 @@
           </a:p>
           <a:p>
             <a:r>
-              <a:rPr sz="1085" b="0" i="0">
+              <a:rPr sz="954" b="0" i="0">
                 <a:solidFill>
                   <a:srgbClr val="EAF7F5"/>
                 </a:solidFill>
@@ -5408,7 +5408,7 @@
           </a:p>
           <a:p>
             <a:r>
-              <a:rPr sz="1085" b="0" i="0">
+              <a:rPr sz="954" b="0" i="0">
                 <a:solidFill>
                   <a:srgbClr val="EAF7F5"/>
                 </a:solidFill>
@@ -5419,7 +5419,7 @@
           </a:p>
           <a:p>
             <a:r>
-              <a:rPr sz="1085" b="0" i="0">
+              <a:rPr sz="954" b="0" i="0">
                 <a:solidFill>
                   <a:srgbClr val="EAF7F5"/>
                 </a:solidFill>
@@ -5430,7 +5430,7 @@
           </a:p>
           <a:p>
             <a:r>
-              <a:rPr sz="1085" b="0" i="0">
+              <a:rPr sz="954" b="0" i="0">
                 <a:solidFill>
                   <a:srgbClr val="EAF7F5"/>
                 </a:solidFill>
@@ -9461,13 +9461,13 @@
           <a:noFill/>
         </p:spPr>
         <p:txBody>
-          <a:bodyPr wrap="square" lIns="0" rIns="0" tIns="0" bIns="0" anchor="t">
-            <a:spAutoFit/>
-          </a:bodyPr>
-          <a:lstStyle/>
-          <a:p>
-            <a:r>
-              <a:rPr sz="1243" b="0" i="0">
+          <a:bodyPr wrap="none" lIns="0" rIns="0" tIns="0" bIns="0" anchor="t">
+            <a:spAutoFit/>
+          </a:bodyPr>
+          <a:lstStyle/>
+          <a:p>
+            <a:r>
+              <a:rPr sz="1094" b="0" i="0">
                 <a:solidFill>
                   <a:srgbClr val="EAF7F5"/>
                 </a:solidFill>
@@ -9478,7 +9478,7 @@
           </a:p>
           <a:p>
             <a:r>
-              <a:rPr sz="1243" b="0" i="0">
+              <a:rPr sz="1094" b="0" i="0">
                 <a:solidFill>
                   <a:srgbClr val="EAF7F5"/>
                 </a:solidFill>
@@ -9489,7 +9489,7 @@
           </a:p>
           <a:p>
             <a:r>
-              <a:rPr sz="1243" b="0" i="0">
+              <a:rPr sz="1094" b="0" i="0">
                 <a:solidFill>
                   <a:srgbClr val="EAF7F5"/>
                 </a:solidFill>
@@ -9500,7 +9500,7 @@
           </a:p>
           <a:p>
             <a:r>
-              <a:rPr sz="1243" b="0" i="0">
+              <a:rPr sz="1094" b="0" i="0">
                 <a:solidFill>
                   <a:srgbClr val="EAF7F5"/>
                 </a:solidFill>
@@ -9511,7 +9511,7 @@
           </a:p>
           <a:p>
             <a:r>
-              <a:rPr sz="1243" b="0" i="0">
+              <a:rPr sz="1094" b="0" i="0">
                 <a:solidFill>
                   <a:srgbClr val="EAF7F5"/>
                 </a:solidFill>
@@ -9522,7 +9522,7 @@
           </a:p>
           <a:p>
             <a:r>
-              <a:rPr sz="1243" b="0" i="0">
+              <a:rPr sz="1094" b="0" i="0">
                 <a:solidFill>
                   <a:srgbClr val="EAF7F5"/>
                 </a:solidFill>
@@ -9533,7 +9533,7 @@
           </a:p>
           <a:p>
             <a:r>
-              <a:rPr sz="1243" b="0" i="0">
+              <a:rPr sz="1094" b="0" i="0">
                 <a:solidFill>
                   <a:srgbClr val="EAF7F5"/>
                 </a:solidFill>
@@ -9544,7 +9544,7 @@
           </a:p>
           <a:p>
             <a:r>
-              <a:rPr sz="1243" b="0" i="0">
+              <a:rPr sz="1094" b="0" i="0">
                 <a:solidFill>
                   <a:srgbClr val="EAF7F5"/>
                 </a:solidFill>
@@ -12337,13 +12337,13 @@
           <a:noFill/>
         </p:spPr>
         <p:txBody>
-          <a:bodyPr wrap="square" lIns="0" rIns="0" tIns="0" bIns="0" anchor="t">
-            <a:spAutoFit/>
-          </a:bodyPr>
-          <a:lstStyle/>
-          <a:p>
-            <a:r>
-              <a:rPr sz="1040" b="0" i="0">
+          <a:bodyPr wrap="none" lIns="0" rIns="0" tIns="0" bIns="0" anchor="t">
+            <a:spAutoFit/>
+          </a:bodyPr>
+          <a:lstStyle/>
+          <a:p>
+            <a:r>
+              <a:rPr sz="915" b="0" i="0">
                 <a:solidFill>
                   <a:srgbClr val="EAF7F5"/>
                 </a:solidFill>
@@ -12354,7 +12354,7 @@
           </a:p>
           <a:p>
             <a:r>
-              <a:rPr sz="1040" b="0" i="0">
+              <a:rPr sz="915" b="0" i="0">
                 <a:solidFill>
                   <a:srgbClr val="EAF7F5"/>
                 </a:solidFill>
@@ -12365,7 +12365,7 @@
           </a:p>
           <a:p>
             <a:r>
-              <a:rPr sz="1040" b="0" i="0">
+              <a:rPr sz="915" b="0" i="0">
                 <a:solidFill>
                   <a:srgbClr val="EAF7F5"/>
                 </a:solidFill>
@@ -12376,7 +12376,7 @@
           </a:p>
           <a:p>
             <a:r>
-              <a:rPr sz="1040" b="0" i="0">
+              <a:rPr sz="915" b="0" i="0">
                 <a:solidFill>
                   <a:srgbClr val="EAF7F5"/>
                 </a:solidFill>
@@ -12387,7 +12387,7 @@
           </a:p>
           <a:p>
             <a:r>
-              <a:rPr sz="1040" b="0" i="0">
+              <a:rPr sz="915" b="0" i="0">
                 <a:solidFill>
                   <a:srgbClr val="EAF7F5"/>
                 </a:solidFill>
@@ -12398,7 +12398,7 @@
           </a:p>
           <a:p>
             <a:r>
-              <a:rPr sz="1040" b="0" i="0">
+              <a:rPr sz="915" b="0" i="0">
                 <a:solidFill>
                   <a:srgbClr val="EAF7F5"/>
                 </a:solidFill>
@@ -12409,7 +12409,7 @@
           </a:p>
           <a:p>
             <a:r>
-              <a:rPr sz="1040" b="0" i="0">
+              <a:rPr sz="915" b="0" i="0">
                 <a:solidFill>
                   <a:srgbClr val="EAF7F5"/>
                 </a:solidFill>
@@ -12420,7 +12420,7 @@
           </a:p>
           <a:p>
             <a:r>
-              <a:rPr sz="1040" b="0" i="0">
+              <a:rPr sz="915" b="0" i="0">
                 <a:solidFill>
                   <a:srgbClr val="EAF7F5"/>
                 </a:solidFill>
@@ -12431,7 +12431,7 @@
           </a:p>
           <a:p>
             <a:r>
-              <a:rPr sz="1040" b="0" i="0">
+              <a:rPr sz="915" b="0" i="0">
                 <a:solidFill>
                   <a:srgbClr val="EAF7F5"/>
                 </a:solidFill>
@@ -12442,7 +12442,7 @@
           </a:p>
           <a:p>
             <a:r>
-              <a:rPr sz="1040" b="0" i="0">
+              <a:rPr sz="915" b="0" i="0">
                 <a:solidFill>
                   <a:srgbClr val="EAF7F5"/>
                 </a:solidFill>
@@ -12453,7 +12453,7 @@
           </a:p>
           <a:p>
             <a:r>
-              <a:rPr sz="1040" b="0" i="0">
+              <a:rPr sz="915" b="0" i="0">
                 <a:solidFill>
                   <a:srgbClr val="EAF7F5"/>
                 </a:solidFill>
@@ -12464,7 +12464,7 @@
           </a:p>
           <a:p>
             <a:r>
-              <a:rPr sz="1040" b="0" i="0">
+              <a:rPr sz="915" b="0" i="0">
                 <a:solidFill>
                   <a:srgbClr val="EAF7F5"/>
                 </a:solidFill>
@@ -12475,7 +12475,7 @@
           </a:p>
           <a:p>
             <a:r>
-              <a:rPr sz="1040" b="0" i="0">
+              <a:rPr sz="915" b="0" i="0">
                 <a:solidFill>
                   <a:srgbClr val="EAF7F5"/>
                 </a:solidFill>
@@ -12763,13 +12763,13 @@
           <a:noFill/>
         </p:spPr>
         <p:txBody>
-          <a:bodyPr wrap="square" lIns="0" rIns="0" tIns="0" bIns="0" anchor="t">
-            <a:spAutoFit/>
-          </a:bodyPr>
-          <a:lstStyle/>
-          <a:p>
-            <a:r>
-              <a:rPr sz="1159" b="0" i="0">
+          <a:bodyPr wrap="none" lIns="0" rIns="0" tIns="0" bIns="0" anchor="t">
+            <a:spAutoFit/>
+          </a:bodyPr>
+          <a:lstStyle/>
+          <a:p>
+            <a:r>
+              <a:rPr sz="1020" b="0" i="0">
                 <a:solidFill>
                   <a:srgbClr val="EAF7F5"/>
                 </a:solidFill>
@@ -12780,7 +12780,7 @@
           </a:p>
           <a:p>
             <a:r>
-              <a:rPr sz="1159" b="0" i="0">
+              <a:rPr sz="1020" b="0" i="0">
                 <a:solidFill>
                   <a:srgbClr val="EAF7F5"/>
                 </a:solidFill>
@@ -12791,7 +12791,7 @@
           </a:p>
           <a:p>
             <a:r>
-              <a:rPr sz="1159" b="0" i="0">
+              <a:rPr sz="1020" b="0" i="0">
                 <a:solidFill>
                   <a:srgbClr val="EAF7F5"/>
                 </a:solidFill>
@@ -12802,7 +12802,7 @@
           </a:p>
           <a:p>
             <a:r>
-              <a:rPr sz="1159" b="0" i="0">
+              <a:rPr sz="1020" b="0" i="0">
                 <a:solidFill>
                   <a:srgbClr val="EAF7F5"/>
                 </a:solidFill>
@@ -12813,7 +12813,7 @@
           </a:p>
           <a:p>
             <a:r>
-              <a:rPr sz="1159" b="0" i="0">
+              <a:rPr sz="1020" b="0" i="0">
                 <a:solidFill>
                   <a:srgbClr val="EAF7F5"/>
                 </a:solidFill>
@@ -12824,7 +12824,7 @@
           </a:p>
           <a:p>
             <a:r>
-              <a:rPr sz="1159" b="0" i="0">
+              <a:rPr sz="1020" b="0" i="0">
                 <a:solidFill>
                   <a:srgbClr val="EAF7F5"/>
                 </a:solidFill>
@@ -12835,7 +12835,7 @@
           </a:p>
           <a:p>
             <a:r>
-              <a:rPr sz="1159" b="0" i="0">
+              <a:rPr sz="1020" b="0" i="0">
                 <a:solidFill>
                   <a:srgbClr val="EAF7F5"/>
                 </a:solidFill>
@@ -12846,7 +12846,7 @@
           </a:p>
           <a:p>
             <a:r>
-              <a:rPr sz="1159" b="0" i="0">
+              <a:rPr sz="1020" b="0" i="0">
                 <a:solidFill>
                   <a:srgbClr val="EAF7F5"/>
                 </a:solidFill>
@@ -12857,7 +12857,7 @@
           </a:p>
           <a:p>
             <a:r>
-              <a:rPr sz="1159" b="0" i="0">
+              <a:rPr sz="1020" b="0" i="0">
                 <a:solidFill>
                   <a:srgbClr val="EAF7F5"/>
                 </a:solidFill>
@@ -18691,13 +18691,13 @@
           <a:noFill/>
         </p:spPr>
         <p:txBody>
-          <a:bodyPr wrap="square" lIns="0" rIns="0" tIns="0" bIns="0" anchor="t">
-            <a:spAutoFit/>
-          </a:bodyPr>
-          <a:lstStyle/>
-          <a:p>
-            <a:r>
-              <a:rPr sz="1062" b="0" i="0">
+          <a:bodyPr wrap="none" lIns="0" rIns="0" tIns="0" bIns="0" anchor="t">
+            <a:spAutoFit/>
+          </a:bodyPr>
+          <a:lstStyle/>
+          <a:p>
+            <a:r>
+              <a:rPr sz="935" b="0" i="0">
                 <a:solidFill>
                   <a:srgbClr val="EAF7F5"/>
                 </a:solidFill>
@@ -18708,7 +18708,7 @@
           </a:p>
           <a:p>
             <a:r>
-              <a:rPr sz="1062" b="0" i="0">
+              <a:rPr sz="935" b="0" i="0">
                 <a:solidFill>
                   <a:srgbClr val="EAF7F5"/>
                 </a:solidFill>
@@ -18719,7 +18719,7 @@
           </a:p>
           <a:p>
             <a:r>
-              <a:rPr sz="1062" b="0" i="0">
+              <a:rPr sz="935" b="0" i="0">
                 <a:solidFill>
                   <a:srgbClr val="EAF7F5"/>
                 </a:solidFill>
@@ -18730,7 +18730,7 @@
           </a:p>
           <a:p>
             <a:r>
-              <a:rPr sz="1062" b="0" i="0">
+              <a:rPr sz="935" b="0" i="0">
                 <a:solidFill>
                   <a:srgbClr val="EAF7F5"/>
                 </a:solidFill>
@@ -18741,7 +18741,7 @@
           </a:p>
           <a:p>
             <a:r>
-              <a:rPr sz="1062" b="0" i="0">
+              <a:rPr sz="935" b="0" i="0">
                 <a:solidFill>
                   <a:srgbClr val="EAF7F5"/>
                 </a:solidFill>
@@ -18752,7 +18752,7 @@
           </a:p>
           <a:p>
             <a:r>
-              <a:rPr sz="1062" b="0" i="0">
+              <a:rPr sz="935" b="0" i="0">
                 <a:solidFill>
                   <a:srgbClr val="EAF7F5"/>
                 </a:solidFill>
@@ -18763,7 +18763,7 @@
           </a:p>
           <a:p>
             <a:r>
-              <a:rPr sz="1062" b="0" i="0">
+              <a:rPr sz="935" b="0" i="0">
                 <a:solidFill>
                   <a:srgbClr val="EAF7F5"/>
                 </a:solidFill>
@@ -18774,7 +18774,7 @@
           </a:p>
           <a:p>
             <a:r>
-              <a:rPr sz="1062" b="0" i="0">
+              <a:rPr sz="935" b="0" i="0">
                 <a:solidFill>
                   <a:srgbClr val="EAF7F5"/>
                 </a:solidFill>
@@ -19062,13 +19062,13 @@
           <a:noFill/>
         </p:spPr>
         <p:txBody>
-          <a:bodyPr wrap="square" lIns="0" rIns="0" tIns="0" bIns="0" anchor="t">
-            <a:spAutoFit/>
-          </a:bodyPr>
-          <a:lstStyle/>
-          <a:p>
-            <a:r>
-              <a:rPr sz="1040" b="0" i="0">
+          <a:bodyPr wrap="none" lIns="0" rIns="0" tIns="0" bIns="0" anchor="t">
+            <a:spAutoFit/>
+          </a:bodyPr>
+          <a:lstStyle/>
+          <a:p>
+            <a:r>
+              <a:rPr sz="915" b="0" i="0">
                 <a:solidFill>
                   <a:srgbClr val="EAF7F5"/>
                 </a:solidFill>
@@ -19079,7 +19079,7 @@
           </a:p>
           <a:p>
             <a:r>
-              <a:rPr sz="1040" b="0" i="0">
+              <a:rPr sz="915" b="0" i="0">
                 <a:solidFill>
                   <a:srgbClr val="EAF7F5"/>
                 </a:solidFill>
@@ -19090,7 +19090,7 @@
           </a:p>
           <a:p>
             <a:r>
-              <a:rPr sz="1040" b="0" i="0">
+              <a:rPr sz="915" b="0" i="0">
                 <a:solidFill>
                   <a:srgbClr val="EAF7F5"/>
                 </a:solidFill>
@@ -19101,7 +19101,7 @@
           </a:p>
           <a:p>
             <a:r>
-              <a:rPr sz="1040" b="0" i="0">
+              <a:rPr sz="915" b="0" i="0">
                 <a:solidFill>
                   <a:srgbClr val="EAF7F5"/>
                 </a:solidFill>
@@ -19112,7 +19112,7 @@
           </a:p>
           <a:p>
             <a:r>
-              <a:rPr sz="1040" b="0" i="0">
+              <a:rPr sz="915" b="0" i="0">
                 <a:solidFill>
                   <a:srgbClr val="EAF7F5"/>
                 </a:solidFill>
@@ -19123,7 +19123,7 @@
           </a:p>
           <a:p>
             <a:r>
-              <a:rPr sz="1040" b="0" i="0">
+              <a:rPr sz="915" b="0" i="0">
                 <a:solidFill>
                   <a:srgbClr val="EAF7F5"/>
                 </a:solidFill>
@@ -19134,7 +19134,7 @@
           </a:p>
           <a:p>
             <a:r>
-              <a:rPr sz="1040" b="0" i="0">
+              <a:rPr sz="915" b="0" i="0">
                 <a:solidFill>
                   <a:srgbClr val="EAF7F5"/>
                 </a:solidFill>
@@ -19145,7 +19145,7 @@
           </a:p>
           <a:p>
             <a:r>
-              <a:rPr sz="1040" b="0" i="0">
+              <a:rPr sz="915" b="0" i="0">
                 <a:solidFill>
                   <a:srgbClr val="EAF7F5"/>
                 </a:solidFill>
@@ -19156,7 +19156,7 @@
           </a:p>
           <a:p>
             <a:r>
-              <a:rPr sz="1040" b="0" i="0">
+              <a:rPr sz="915" b="0" i="0">
                 <a:solidFill>
                   <a:srgbClr val="EAF7F5"/>
                 </a:solidFill>
@@ -19167,7 +19167,7 @@
           </a:p>
           <a:p>
             <a:r>
-              <a:rPr sz="1040" b="0" i="0">
+              <a:rPr sz="915" b="0" i="0">
                 <a:solidFill>
                   <a:srgbClr val="EAF7F5"/>
                 </a:solidFill>
@@ -19178,7 +19178,7 @@
           </a:p>
           <a:p>
             <a:r>
-              <a:rPr sz="1040" b="0" i="0">
+              <a:rPr sz="915" b="0" i="0">
                 <a:solidFill>
                   <a:srgbClr val="EAF7F5"/>
                 </a:solidFill>
@@ -19189,7 +19189,7 @@
           </a:p>
           <a:p>
             <a:r>
-              <a:rPr sz="1040" b="0" i="0">
+              <a:rPr sz="915" b="0" i="0">
                 <a:solidFill>
                   <a:srgbClr val="EAF7F5"/>
                 </a:solidFill>
@@ -19200,7 +19200,7 @@
           </a:p>
           <a:p>
             <a:r>
-              <a:rPr sz="1040" b="0" i="0">
+              <a:rPr sz="915" b="0" i="0">
                 <a:solidFill>
                   <a:srgbClr val="EAF7F5"/>
                 </a:solidFill>
